--- a/SPORTS_HUB_프로젝트_설계_및_명세서.pptx
+++ b/SPORTS_HUB_프로젝트_설계_및_명세서.pptx
@@ -3244,7 +3244,7 @@
               </a:defRPr>
             </a:pPr>
             <a:r>
-              <a:t>실시간 스포츠 순위 · 경기결과 스코어보드 · 소스구성도 · 프로세스 흐름도</a:t>
+              <a:t>실시간 스포츠 순위 · 경기결과 스코어보드 · 네이버 실시간 문자중계 · 프로세스 흐름도</a:t>
             </a:r>
           </a:p>
         </p:txBody>
@@ -3312,7 +3312,7 @@
               </a:defRPr>
             </a:pPr>
             <a:r>
-              <a:t>• 문서 버전: v2.1.0  |  작성일: 2026-09-19  |  저장소: https://github.com/th0501park-tech/master2</a:t>
+              <a:t>• 문서 버전: v2.2.0  |  작성일: 2026-09-19  |  저장소: https://github.com/th0501park-tech/master2</a:t>
             </a:r>
           </a:p>
         </p:txBody>
@@ -3504,7 +3504,7 @@
               </a:defRPr>
             </a:pPr>
             <a:r>
-              <a:t>SPORTS HUB v2.1.0  |  실시간 스포츠 종합 대시보드 시스템 명세서  |  Confidential</a:t>
+              <a:t>SPORTS HUB v2.2.0  |  실시간 스포츠 종합 대시보드 시스템 명세서  |  Confidential</a:t>
             </a:r>
           </a:p>
         </p:txBody>
@@ -3710,7 +3710,7 @@
               </a:defRPr>
             </a:pPr>
             <a:r>
-              <a:t>🔥 상단 스코어보드 &amp; 실시간 LIVE</a:t>
+              <a:t>🔥 상단 스코어 &amp; 네이버 문자중계</a:t>
             </a:r>
           </a:p>
           <a:p>
@@ -3726,7 +3726,7 @@
               </a:defRPr>
             </a:pPr>
             <a:r>
-              <a:t>사용자 중심의 상하 레이아웃 배치 전환 완료</a:t>
+              <a:t>실시간 LIVE 중계확인 모달 &amp; 레이아웃 혁신</a:t>
             </a:r>
           </a:p>
           <a:p>
@@ -3742,7 +3742,11 @@
               </a:defRPr>
             </a:pPr>
             <a:r>
-              <a:t>• 레이아웃 혁신: 최상단에 경기 결과 및 스코어보드 우선 노출</a:t>
+              <a:t>• 실시간 문자중계 모달: LIVE 경기 카드에서 [⚡ 실시간 중계확인] 클릭 시 네이버스포츠 실시간 문자중계 즉시 렌더링</a:t>
+            </a:r>
+            <a:br/>
+            <a:r>
+              <a:t>• 볼카운트 / 투구 추적 / 이닝별 상세 결과를 모달에서 이탈 없이 확인</a:t>
             </a:r>
             <a:br/>
             <a:r>
@@ -3750,11 +3754,7 @@
             </a:r>
             <a:br/>
             <a:r>
-              <a:t>• 축구(K리그/해외축구): 금주 기준 LIVE(전·후반 분), 금주 예정 시간, 지난주 종료 결과</a:t>
-            </a:r>
-            <a:br/>
-            <a:r>
-              <a:t>• 상태 필터 칩: [전체], [🔴 LIVE], [최근 결과], [금주/내일 예정] 원클릭 필터</a:t>
+              <a:t>• 축구(K리그/해외축구): 공식 상태(1S/2S/HT/ET/PK), 네이버 kfootball 실시간 분/스코어 연동</a:t>
             </a:r>
           </a:p>
         </p:txBody>
@@ -3871,7 +3871,7 @@
             </a:r>
             <a:br/>
             <a:r>
-              <a:t>• Facade 패턴: 무거운 Iframe 대신 고화질 포스터를 선로딩하여 트래픽 90% 절감</a:t>
+              <a:t>• Facade 패턴: 종료 경기 하이라이트는 고화질 포스터를 선로딩하여 트래픽 90% 절감</a:t>
             </a:r>
             <a:br/>
             <a:r>
@@ -4071,7 +4071,7 @@
               </a:defRPr>
             </a:pPr>
             <a:r>
-              <a:t>SPORTS HUB v2.1.0  |  실시간 스포츠 종합 대시보드 시스템 명세서  |  Confidential</a:t>
+              <a:t>SPORTS HUB v2.2.0  |  실시간 스포츠 종합 대시보드 시스템 명세서  |  Confidential</a:t>
             </a:r>
           </a:p>
         </p:txBody>
@@ -4677,7 +4677,7 @@
               </a:defRPr>
             </a:pPr>
             <a:r>
-              <a:t>SPORTS HUB v2.1.0  |  실시간 스포츠 종합 대시보드 시스템 명세서  |  Confidential</a:t>
+              <a:t>SPORTS HUB v2.2.0  |  실시간 스포츠 종합 대시보드 시스템 명세서  |  Confidential</a:t>
             </a:r>
           </a:p>
         </p:txBody>
@@ -5032,7 +5032,7 @@
               </a:defRPr>
             </a:pPr>
             <a:r>
-              <a:t>kleague_service.py (약 850 라인)</a:t>
+              <a:t>kleague_service.py (네이버 kfootball + K리그 공식 API)</a:t>
             </a:r>
           </a:p>
           <a:p>
@@ -5048,19 +5048,19 @@
               </a:defRPr>
             </a:pPr>
             <a:r>
-              <a:t>• K리그 공식 데이터 포털 (getScheduleList.do, teamRank.do)</a:t>
-            </a:r>
-            <a:br/>
-            <a:r>
-              <a:t>• 주차별 필터링: 금주 일요일까지 예정된 경기만 '금주 예정' 표기</a:t>
-            </a:r>
-            <a:br/>
-            <a:r>
-              <a:t>• 지난 경기 필터링: 지난주 월요일 이후 종료된 경기만 최신순 노출</a:t>
-            </a:r>
-            <a:br/>
-            <a:r>
-              <a:t>• 실시간 경기 진행시간: 전반(1H), 후반(2H), 하프타임(HT) 분기</a:t>
+              <a:t>• 네이버 스포츠 K리그 API(kfootball) + K리그 공식 포털 하이브리드 연동</a:t>
+            </a:r>
+            <a:br/>
+            <a:r>
+              <a:t>• 실시간 LIVE 동기화: status: STARTED, 실시간 분(1S 30, 2S 15 등) 및 점수 반영</a:t>
+            </a:r>
+            <a:br/>
+            <a:r>
+              <a:t>• 네이버 gameId 자동 추출: 네이버 실시간 문자중계 팝업 모달 연동 지원</a:t>
+            </a:r>
+            <a:br/>
+            <a:r>
+              <a:t>• 주차별 필터링: 금주 일요일까지 예정된 경기만 '금주 예정', 지난주 경기만 종료 표기</a:t>
             </a:r>
             <a:br/>
             <a:r>
@@ -5177,11 +5177,11 @@
               </a:defRPr>
             </a:pPr>
             <a:r>
-              <a:t>• ESPN Soccer Scoreboard &amp; Statistics API (site.web.api.espn.com)</a:t>
-            </a:r>
-            <a:br/>
-            <a:r>
-              <a:t>• 대상 리그: EPL, 라리가, 분데스리가, UCL, UEL</a:t>
+              <a:t>• ESPN Soccer Scoreboard API (EPL, 라리가, 분데스리가, UCL, UEL)</a:t>
+            </a:r>
+            <a:br/>
+            <a:r>
+              <a:t>• 한국 표준시(KST, UTC+9) 자동 변환: UTC 일정을 한국 시간대로 정확히 보정</a:t>
             </a:r>
             <a:br/>
             <a:r>
@@ -5385,7 +5385,7 @@
               </a:defRPr>
             </a:pPr>
             <a:r>
-              <a:t>SPORTS HUB v2.1.0  |  실시간 스포츠 종합 대시보드 시스템 명세서  |  Confidential</a:t>
+              <a:t>SPORTS HUB v2.2.0  |  실시간 스포츠 종합 대시보드 시스템 명세서  |  Confidential</a:t>
             </a:r>
           </a:p>
         </p:txBody>
@@ -5466,7 +5466,7 @@
               </a:defRPr>
             </a:pPr>
             <a:r>
-              <a:t>🎛️ 경기 상태별 원클릭 필터 칩</a:t>
+              <a:t>⚡ 실시간 중계확인 &amp; 네이버 문자중계</a:t>
             </a:r>
           </a:p>
           <a:p>
@@ -5482,7 +5482,7 @@
               </a:defRPr>
             </a:pPr>
             <a:r>
-              <a:t>main.js (setMatchFilter, filterMatchesByStatus)</a:t>
+              <a:t>main.js (openLiveRelayModal, closeLiveRelayModal)</a:t>
             </a:r>
           </a:p>
           <a:p>
@@ -5498,19 +5498,19 @@
               </a:defRPr>
             </a:pPr>
             <a:r>
-              <a:t>• 4종 필터 칩: [전체], [🔴 LIVE], [최근 결과], [금주/내일 예정]</a:t>
-            </a:r>
-            <a:br/>
-            <a:r>
-              <a:t>• 클릭 시 새로고침 없이 해당 상태의 경기 카드만 즉시 필터링 렌더링</a:t>
-            </a:r>
-            <a:br/>
-            <a:r>
-              <a:t>• LIVE 상태 시 실시간 깜빡임 펄스 뱃지 &amp; 실시간 투수/이닝 표기</a:t>
-            </a:r>
-            <a:br/>
-            <a:r>
-              <a:t>• .match-filter-chip.active 스타일 적용 및 라이트/다크모드 완벽 대응</a:t>
+              <a:t>• LIVE 진행 중인 경기: 하단 [하이라이트] 대신 [⚡ 실시간 중계확인] 버튼 노출</a:t>
+            </a:r>
+            <a:br/>
+            <a:r>
+              <a:t>• 원클릭 팝업 모달: 네이버스포츠 실시간 문자중계(/relay)를 인앱 Iframe으로 즉시 렌더링</a:t>
+            </a:r>
+            <a:br/>
+            <a:r>
+              <a:t>• 외부 브라우저 새창 이동([네이버스포츠로 이동]) 및 ESC/외부클릭 닫기 지원</a:t>
+            </a:r>
+            <a:br/>
+            <a:r>
+              <a:t>• 타 종목(KBO, K리그 등) liveUrl / gameId 기반 동적 라우팅</a:t>
             </a:r>
           </a:p>
         </p:txBody>
@@ -5591,7 +5591,7 @@
               </a:defRPr>
             </a:pPr>
             <a:r>
-              <a:t>⭐ 마이팀(선호 구단) 개인화</a:t>
+              <a:t>🎛️ 경기 상태별 원클릭 필터 칩</a:t>
             </a:r>
           </a:p>
           <a:p>
@@ -5607,7 +5607,7 @@
               </a:defRPr>
             </a:pPr>
             <a:r>
-              <a:t>main.js (toggleFavoriteTeam, updateMyTeamBanner)</a:t>
+              <a:t>main.js (setMatchFilter, filterMatchesByStatus)</a:t>
             </a:r>
           </a:p>
           <a:p>
@@ -5623,19 +5623,19 @@
               </a:defRPr>
             </a:pPr>
             <a:r>
-              <a:t>• 경기 카드 및 순위표의 ★ 별표 클릭 시 선호 구단으로 즉시 지정</a:t>
-            </a:r>
-            <a:br/>
-            <a:r>
-              <a:t>• localStorage 연동: 브라우저 재방문 시에도 선호 구단 상태 영구 보존</a:t>
-            </a:r>
-            <a:br/>
-            <a:r>
-              <a:t>• 선호 구단 등록 시 해당 구단 경기 최상단 우선 정렬 &amp; 골드 링 테두리 강조</a:t>
-            </a:r>
-            <a:br/>
-            <a:r>
-              <a:t>• [선호 구단 경기만 보기] 원클릭 필터 제공</a:t>
+              <a:t>• 4종 필터 칩: [전체], [🔴 LIVE], [최근 결과], [금주/내일 예정]</a:t>
+            </a:r>
+            <a:br/>
+            <a:r>
+              <a:t>• 클릭 시 새로고침 없이 해당 상태의 경기 카드만 즉시 필터링 렌더링</a:t>
+            </a:r>
+            <a:br/>
+            <a:r>
+              <a:t>• LIVE 상태 시 실시간 깜빡임 펄스 뱃지 &amp; 실시간 투수/이닝 표기</a:t>
+            </a:r>
+            <a:br/>
+            <a:r>
+              <a:t>• .match-filter-chip.active 스타일 적용 및 라이트/다크모드 완벽 대응</a:t>
             </a:r>
           </a:p>
         </p:txBody>
@@ -5716,7 +5716,7 @@
               </a:defRPr>
             </a:pPr>
             <a:r>
-              <a:t>🎬 Facade 기반 영상 지연 로딩</a:t>
+              <a:t>⭐ 마이팀(선호 구단) 개인화</a:t>
             </a:r>
           </a:p>
           <a:p>
@@ -5732,7 +5732,7 @@
               </a:defRPr>
             </a:pPr>
             <a:r>
-              <a:t>main.js (Facade Player &amp; Iframe On-Demand)</a:t>
+              <a:t>main.js (toggleFavoriteTeam, updateMyTeamBanner)</a:t>
             </a:r>
           </a:p>
           <a:p>
@@ -5748,19 +5748,19 @@
               </a:defRPr>
             </a:pPr>
             <a:r>
-              <a:t>• 기존: 무거운 YouTube Iframe 수십 개 동시 로딩으로 브라우저 멈춤 발생</a:t>
-            </a:r>
-            <a:br/>
-            <a:r>
-              <a:t>• 개선: Facade 기법 적용으로 고화질 썸네일 포스터 및 재생 버튼만 초기 렌더링</a:t>
-            </a:r>
-            <a:br/>
-            <a:r>
-              <a:t>• 사용자가 [재생] 또는 카드 클릭 시에만 해당 Iframe을 동적으로 삽입하여 재생</a:t>
-            </a:r>
-            <a:br/>
-            <a:r>
-              <a:t>• 초기 페이지 로딩 속도 0.5초 이내 유지 및 네트워크 데이터 90% 절감</a:t>
+              <a:t>• 경기 카드 및 순위표의 ★ 별표 클릭 시 선호 구단으로 즉시 지정</a:t>
+            </a:r>
+            <a:br/>
+            <a:r>
+              <a:t>• localStorage 연동: 브라우저 재방문 시에도 선호 구단 상태 영구 보존</a:t>
+            </a:r>
+            <a:br/>
+            <a:r>
+              <a:t>• 선호 구단 등록 시 해당 구단 경기 최상단 우선 정렬 &amp; 골드 링 테두리 강조</a:t>
+            </a:r>
+            <a:br/>
+            <a:r>
+              <a:t>• [선호 구단 경기만 보기] 원클릭 필터 제공</a:t>
             </a:r>
           </a:p>
         </p:txBody>
@@ -5841,7 +5841,7 @@
               </a:defRPr>
             </a:pPr>
             <a:r>
-              <a:t>📱 반응형 레이아웃 &amp; 테마</a:t>
+              <a:t>🎬 Facade 기반 하이라이트 플레이어</a:t>
             </a:r>
           </a:p>
           <a:p>
@@ -5857,7 +5857,7 @@
               </a:defRPr>
             </a:pPr>
             <a:r>
-              <a:t>index.html &amp; style.css (TailwindCSS Grid)</a:t>
+              <a:t>main.js (Facade Player &amp; Iframe On-Demand)</a:t>
             </a:r>
           </a:p>
           <a:p>
@@ -5873,19 +5873,19 @@
               </a:defRPr>
             </a:pPr>
             <a:r>
-              <a:t>• 상단: 실시간 스코어보드 그리드 (모바일 1열, 태블릿 2열, 데스크톱 3열)</a:t>
-            </a:r>
-            <a:br/>
-            <a:r>
-              <a:t>• 하단: 대형 공식 하이라이트 영상 플레이어 + 우측 썸네일 재생 목록</a:t>
-            </a:r>
-            <a:br/>
-            <a:r>
-              <a:t>• 다크모드: 시스템 환경 자동 감지 및 GNB 버튼을 통한 즉시 전환</a:t>
-            </a:r>
-            <a:br/>
-            <a:r>
-              <a:t>• 모바일 최적화: 가로 스크롤 테이블 및 터치 인터랙션 완벽 대응</a:t>
+              <a:t>• Facade 기법: YouTube 고화질 썸네일 포스터 및 재생 버튼만 초기 렌더링</a:t>
+            </a:r>
+            <a:br/>
+            <a:r>
+              <a:t>• 종료/예정 경기에서 [🎬 하이라이트] 클릭 시 해당 영상으로 스크롤 이동 및 자동 로드</a:t>
+            </a:r>
+            <a:br/>
+            <a:r>
+              <a:t>• 초기 페이지 로딩 속도 0.5초 이내 유지 및 불필요한 네트워크 트래픽 90% 절감</a:t>
+            </a:r>
+            <a:br/>
+            <a:r>
+              <a:t>• 다크모드/라이트모드 완벽 대응 및 반응형 모바일 최적화</a:t>
             </a:r>
           </a:p>
         </p:txBody>
@@ -6077,7 +6077,7 @@
               </a:defRPr>
             </a:pPr>
             <a:r>
-              <a:t>SPORTS HUB v2.1.0  |  실시간 스포츠 종합 대시보드 시스템 명세서  |  Confidential</a:t>
+              <a:t>SPORTS HUB v2.2.0  |  실시간 스포츠 종합 대시보드 시스템 명세서  |  Confidential</a:t>
             </a:r>
           </a:p>
         </p:txBody>
@@ -6561,7 +6561,7 @@
             </a:r>
             <a:br/>
             <a:r>
-              <a:t>• 해당 경기 없을 시 안내 메시지 렌더링</a:t>
+              <a:t>• LIVE 시 중계확인 버튼, 종료 시 하이라이트 버튼 표출</a:t>
             </a:r>
           </a:p>
         </p:txBody>
@@ -6658,7 +6658,7 @@
               </a:defRPr>
             </a:pPr>
             <a:r>
-              <a:t>영상 재생 및 상호작용</a:t>
+              <a:t>실시간 중계 &amp; 영상 상호작용</a:t>
             </a:r>
           </a:p>
           <a:p>
@@ -6674,15 +6674,15 @@
               </a:defRPr>
             </a:pPr>
             <a:r>
-              <a:t>• 스코어보드 내 [하이라이트] 클릭 시 영상 이동</a:t>
-            </a:r>
-            <a:br/>
-            <a:r>
-              <a:t>• Facade 포스터 -&gt; YouTube Iframe 동적 전환</a:t>
-            </a:r>
-            <a:br/>
-            <a:r>
-              <a:t>• 무거운 트래픽 지연 없이 즉시 스트리밍</a:t>
+              <a:t>• [⚡ 실시간 중계확인]: 네이버 문자중계 모달 Iframe 팝업</a:t>
+            </a:r>
+            <a:br/>
+            <a:r>
+              <a:t>• [🎬 하이라이트]: 공식 영상 플레이어 이동 및 스트리밍</a:t>
+            </a:r>
+            <a:br/>
+            <a:r>
+              <a:t>• 외부 링크 새창 이동 지원</a:t>
             </a:r>
           </a:p>
         </p:txBody>
@@ -6874,7 +6874,7 @@
               </a:defRPr>
             </a:pPr>
             <a:r>
-              <a:t>SPORTS HUB v2.1.0  |  실시간 스포츠 종합 대시보드 시스템 명세서  |  Confidential</a:t>
+              <a:t>SPORTS HUB v2.2.0  |  실시간 스포츠 종합 대시보드 시스템 명세서  |  Confidential</a:t>
             </a:r>
           </a:p>
         </p:txBody>
@@ -6991,15 +6991,15 @@
             </a:r>
             <a:br/>
             <a:r>
-              <a:t>• 주요 파라미터: fields=basic,baseball&amp;fromDate,toDate&amp;size=100&amp;upperCategoryId=kbaseball</a:t>
-            </a:r>
-            <a:br/>
-            <a:r>
-              <a:t>• 수집 항목: 실시간 이닝, statusCode(STARTED/RESULT/BEFORE), 승·패전 결정투수, 선발투수 예고</a:t>
-            </a:r>
-            <a:br/>
-            <a:r>
-              <a:t>• 개선 사항: size=100 적용 및 RESULT 상태 판별 수정으로 당일 LIVE 및 어제/내일 경기 완벽 분기</a:t>
+              <a:t>• 파라미터: upperCategoryId=kbaseball&amp;fromDate,toDate&amp;size=100</a:t>
+            </a:r>
+            <a:br/>
+            <a:r>
+              <a:t>• 실시간 항목: 실시간 이닝, statusCode(STARTED/RESULT/BEFORE), 승·패 결정투수, 선발투수 예고</a:t>
+            </a:r>
+            <a:br/>
+            <a:r>
+              <a:t>• 네이버 실시간 문자중계 URL (https://m.sports.naver.com/game/{gameId}/relay) 연동</a:t>
             </a:r>
           </a:p>
         </p:txBody>
@@ -7116,11 +7116,11 @@
             </a:r>
             <a:br/>
             <a:r>
-              <a:t>• 주요 파라미터: sportId=1&amp;startDate,endDate&amp;hydrate=linescore,decisions,probablePitcher</a:t>
-            </a:r>
-            <a:br/>
-            <a:r>
-              <a:t>• 수집 항목: 실시간 이닝 스코어보드, 승리(W)·패전(L)·세이브(S) 결정투수, 선발투수 매치업</a:t>
+              <a:t>• 파라미터: sportId=1&amp;startDate,endDate&amp;hydrate=linescore,decisions,probablePitcher</a:t>
+            </a:r>
+            <a:br/>
+            <a:r>
+              <a:t>• 실시간 이닝 스코어보드, 승(W)·패(L)·세이브(S) 결정투수, 선발투수 매치업</a:t>
             </a:r>
             <a:br/>
             <a:r>
@@ -7205,7 +7205,7 @@
               </a:defRPr>
             </a:pPr>
             <a:r>
-              <a:t>⚽ K리그 공식 데이터 포털</a:t>
+              <a:t>⚽ 네이버 스포츠 K리그 &amp; 공식 포털 API</a:t>
             </a:r>
           </a:p>
           <a:p>
@@ -7221,7 +7221,7 @@
               </a:defRPr>
             </a:pPr>
             <a:r>
-              <a:t>https://www.kleague.com/getScheduleList.do</a:t>
+              <a:t>https://api-gw.sports.naver.com/schedule/games</a:t>
             </a:r>
           </a:p>
           <a:p>
@@ -7237,19 +7237,19 @@
               </a:defRPr>
             </a:pPr>
             <a:r>
-              <a:t>• 연동 방식: HTTP POST, JSON 응답 (Referer 헤더 필수)</a:t>
-            </a:r>
-            <a:br/>
-            <a:r>
-              <a:t>• 주요 파라미터: leagueId(1 or 2), year, month</a:t>
-            </a:r>
-            <a:br/>
-            <a:r>
-              <a:t>• 주차 필터: 금주 일요일까지 예정된 경기만 '금주 예정' 표기, 지난주 월요일 이후 경기만 종료 표기</a:t>
-            </a:r>
-            <a:br/>
-            <a:r>
-              <a:t>• 수집 항목: 전반(1H)/후반(2H) 실시간 분 정보, 경기장, 중계채널, K1/K2 순위 및 득점순위</a:t>
+              <a:t>• 연동 방식: HTTP GET (네이버 kfootball) + POST (K리그 공식 포털 getScheduleList.do)</a:t>
+            </a:r>
+            <a:br/>
+            <a:r>
+              <a:t>• 실시간 LIVE 동기화: 네이버 K리그 API로 실시간 분/점수/gameId 정밀 추출</a:t>
+            </a:r>
+            <a:br/>
+            <a:r>
+              <a:t>• 주차 필터: 금주 일요일까지 경기만 '금주 예정' 표기, 지난주 월요일 이후 경기만 종료 표기</a:t>
+            </a:r>
+            <a:br/>
+            <a:r>
+              <a:t>• 실시간 문자중계 팝업 모달 연동 및 25개 구단 엠블럼 매핑</a:t>
             </a:r>
           </a:p>
         </p:txBody>
@@ -7366,11 +7366,11 @@
             </a:r>
             <a:br/>
             <a:r>
-              <a:t>• 동적 캘린더 연동: 지난주부터 금주 주말까지의 핵심 매치일만 동적 추출하여 요청</a:t>
-            </a:r>
-            <a:br/>
-            <a:r>
-              <a:t>• 수집 항목: 실시간 스코어, 전·후반 진행시간(displayClock), 경기상태, 하이라이트 영상</a:t>
+              <a:t>• KST 자동 변환: UTC 일정 데이터를 한국 표준시(UTC+9)로 보정하여 날짜/시간 정확도 확보</a:t>
+            </a:r>
+            <a:br/>
+            <a:r>
+              <a:t>• 동적 캘린더 연동: 지난주부터 금주 주말까지의 핵심 매치일만 동적 추출</a:t>
             </a:r>
             <a:br/>
             <a:r>
@@ -7566,7 +7566,7 @@
               </a:defRPr>
             </a:pPr>
             <a:r>
-              <a:t>SPORTS HUB v2.1.0  |  실시간 스포츠 종합 대시보드 시스템 명세서  |  Confidential</a:t>
+              <a:t>SPORTS HUB v2.2.0  |  실시간 스포츠 종합 대시보드 시스템 명세서  |  Confidential</a:t>
             </a:r>
           </a:p>
         </p:txBody>

--- a/SPORTS_HUB_프로젝트_설계_및_명세서.pptx
+++ b/SPORTS_HUB_프로젝트_설계_및_명세서.pptx
@@ -13,6 +13,7 @@
     <p:sldId id="261" r:id="rId12"/>
     <p:sldId id="262" r:id="rId13"/>
     <p:sldId id="263" r:id="rId14"/>
+    <p:sldId id="264" r:id="rId15"/>
   </p:sldIdLst>
   <p:sldSz cx="12191695" cy="6858000" type="screen4x3"/>
   <p:notesSz cx="6858000" cy="9144000"/>
@@ -3312,7 +3313,7 @@
               </a:defRPr>
             </a:pPr>
             <a:r>
-              <a:t>• 문서 버전: v2.2.0  |  작성일: 2026-09-19  |  저장소: https://github.com/th0501park-tech/master2</a:t>
+              <a:t>• 문서 버전: v2.3.0  |  작성일: 2026-09-20  |  저장소: https://github.com/th0501park-tech/master2</a:t>
             </a:r>
           </a:p>
         </p:txBody>
@@ -3504,7 +3505,7 @@
               </a:defRPr>
             </a:pPr>
             <a:r>
-              <a:t>SPORTS HUB v2.2.0  |  실시간 스포츠 종합 대시보드 시스템 명세서  |  Confidential</a:t>
+              <a:t>SPORTS HUB v2.3.0  |  실시간 스포츠 종합 대시보드 시스템 명세서  |  Confidential</a:t>
             </a:r>
           </a:p>
         </p:txBody>
@@ -4071,7 +4072,7 @@
               </a:defRPr>
             </a:pPr>
             <a:r>
-              <a:t>SPORTS HUB v2.2.0  |  실시간 스포츠 종합 대시보드 시스템 명세서  |  Confidential</a:t>
+              <a:t>SPORTS HUB v2.3.0  |  실시간 스포츠 종합 대시보드 시스템 명세서  |  Confidential</a:t>
             </a:r>
           </a:p>
         </p:txBody>
@@ -4677,7 +4678,7 @@
               </a:defRPr>
             </a:pPr>
             <a:r>
-              <a:t>SPORTS HUB v2.2.0  |  실시간 스포츠 종합 대시보드 시스템 명세서  |  Confidential</a:t>
+              <a:t>SPORTS HUB v2.3.0  |  실시간 스포츠 종합 대시보드 시스템 명세서  |  Confidential</a:t>
             </a:r>
           </a:p>
         </p:txBody>
@@ -5385,7 +5386,7 @@
               </a:defRPr>
             </a:pPr>
             <a:r>
-              <a:t>SPORTS HUB v2.2.0  |  실시간 스포츠 종합 대시보드 시스템 명세서  |  Confidential</a:t>
+              <a:t>SPORTS HUB v2.3.0  |  실시간 스포츠 종합 대시보드 시스템 명세서  |  Confidential</a:t>
             </a:r>
           </a:p>
         </p:txBody>
@@ -6077,7 +6078,7 @@
               </a:defRPr>
             </a:pPr>
             <a:r>
-              <a:t>SPORTS HUB v2.2.0  |  실시간 스포츠 종합 대시보드 시스템 명세서  |  Confidential</a:t>
+              <a:t>SPORTS HUB v2.3.0  |  실시간 스포츠 종합 대시보드 시스템 명세서  |  Confidential</a:t>
             </a:r>
           </a:p>
         </p:txBody>
@@ -6874,7 +6875,7 @@
               </a:defRPr>
             </a:pPr>
             <a:r>
-              <a:t>SPORTS HUB v2.2.0  |  실시간 스포츠 종합 대시보드 시스템 명세서  |  Confidential</a:t>
+              <a:t>SPORTS HUB v2.3.0  |  실시간 스포츠 종합 대시보드 시스템 명세서  |  Confidential</a:t>
             </a:r>
           </a:p>
         </p:txBody>
@@ -7566,7 +7567,7 @@
               </a:defRPr>
             </a:pPr>
             <a:r>
-              <a:t>SPORTS HUB v2.2.0  |  실시간 스포츠 종합 대시보드 시스템 명세서  |  Confidential</a:t>
+              <a:t>SPORTS HUB v2.3.0  |  실시간 스포츠 종합 대시보드 시스템 명세서  |  Confidential</a:t>
             </a:r>
           </a:p>
         </p:txBody>
@@ -8051,6 +8052,670 @@
             <a:br/>
             <a:r>
               <a:t>   - 종목별 렌더링 함수 독립 분리로 한 종목 에러가 타 종목에 미치는 영향 0%</a:t>
+            </a:r>
+          </a:p>
+        </p:txBody>
+      </p:sp>
+    </p:spTree>
+  </p:cSld>
+  <p:clrMapOvr>
+    <a:masterClrMapping/>
+  </p:clrMapOvr>
+</p:sld>
+</file>
+
+<file path=ppt/slides/slide9.xml><?xml version="1.0" encoding="utf-8"?>
+<p:sld xmlns:a="http://schemas.openxmlformats.org/drawingml/2006/main" xmlns:p="http://schemas.openxmlformats.org/presentationml/2006/main" xmlns:r="http://schemas.openxmlformats.org/officeDocument/2006/relationships">
+  <p:cSld>
+    <p:spTree>
+      <p:nvGrpSpPr>
+        <p:cNvPr id="1" name=""/>
+        <p:cNvGrpSpPr/>
+        <p:nvPr/>
+      </p:nvGrpSpPr>
+      <p:grpSpPr/>
+      <p:sp>
+        <p:nvSpPr>
+          <p:cNvPr id="2" name="Rectangle 1"/>
+          <p:cNvSpPr/>
+          <p:nvPr/>
+        </p:nvSpPr>
+        <p:spPr>
+          <a:xfrm>
+            <a:off x="0" y="0"/>
+            <a:ext cx="12191695" cy="6858000"/>
+          </a:xfrm>
+          <a:prstGeom prst="rect">
+            <a:avLst/>
+          </a:prstGeom>
+          <a:solidFill>
+            <a:srgbClr val="F8FAFC"/>
+          </a:solidFill>
+          <a:ln>
+            <a:noFill/>
+          </a:ln>
+        </p:spPr>
+        <p:style>
+          <a:lnRef idx="1">
+            <a:schemeClr val="accent1"/>
+          </a:lnRef>
+          <a:fillRef idx="3">
+            <a:schemeClr val="accent1"/>
+          </a:fillRef>
+          <a:effectRef idx="2">
+            <a:schemeClr val="accent1"/>
+          </a:effectRef>
+          <a:fontRef idx="minor">
+            <a:schemeClr val="lt1"/>
+          </a:fontRef>
+        </p:style>
+        <p:txBody>
+          <a:bodyPr rtlCol="0" anchor="ctr"/>
+          <a:lstStyle/>
+          <a:p>
+            <a:pPr algn="ctr"/>
+          </a:p>
+        </p:txBody>
+      </p:sp>
+      <p:sp>
+        <p:nvSpPr>
+          <p:cNvPr id="3" name="TextBox 2"/>
+          <p:cNvSpPr txBox="1"/>
+          <p:nvPr/>
+        </p:nvSpPr>
+        <p:spPr>
+          <a:xfrm>
+            <a:off x="731520" y="365760"/>
+            <a:ext cx="10698480" cy="1005840"/>
+          </a:xfrm>
+          <a:prstGeom prst="rect">
+            <a:avLst/>
+          </a:prstGeom>
+          <a:noFill/>
+        </p:spPr>
+        <p:txBody>
+          <a:bodyPr wrap="square" lIns="0" tIns="0" rIns="0" bIns="0">
+            <a:spAutoFit/>
+          </a:bodyPr>
+          <a:lstStyle/>
+          <a:p>
+            <a:pPr>
+              <a:defRPr sz="1000" b="1">
+                <a:solidFill>
+                  <a:srgbClr val="2563EB"/>
+                </a:solidFill>
+                <a:latin typeface="Malgun Gothic"/>
+              </a:defRPr>
+            </a:pPr>
+            <a:r>
+              <a:t>08. SYSTEM CHANGELOG (v2.3.0)</a:t>
+            </a:r>
+          </a:p>
+          <a:p>
+            <a:pPr>
+              <a:spcBef>
+                <a:spcPts val="400"/>
+              </a:spcBef>
+              <a:defRPr sz="2200" b="1">
+                <a:solidFill>
+                  <a:srgbClr val="0F172A"/>
+                </a:solidFill>
+                <a:latin typeface="Malgun Gothic"/>
+              </a:defRPr>
+            </a:pPr>
+            <a:r>
+              <a:t>최근 시스템 수정 및 안정화 보완 이력</a:t>
+            </a:r>
+          </a:p>
+        </p:txBody>
+      </p:sp>
+      <p:sp>
+        <p:nvSpPr>
+          <p:cNvPr id="4" name="Rectangle 3"/>
+          <p:cNvSpPr/>
+          <p:nvPr/>
+        </p:nvSpPr>
+        <p:spPr>
+          <a:xfrm>
+            <a:off x="731520" y="6400800"/>
+            <a:ext cx="10698480" cy="18288"/>
+          </a:xfrm>
+          <a:prstGeom prst="rect">
+            <a:avLst/>
+          </a:prstGeom>
+          <a:solidFill>
+            <a:srgbClr val="CBD5E1"/>
+          </a:solidFill>
+          <a:ln>
+            <a:noFill/>
+          </a:ln>
+        </p:spPr>
+        <p:style>
+          <a:lnRef idx="1">
+            <a:schemeClr val="accent1"/>
+          </a:lnRef>
+          <a:fillRef idx="3">
+            <a:schemeClr val="accent1"/>
+          </a:fillRef>
+          <a:effectRef idx="2">
+            <a:schemeClr val="accent1"/>
+          </a:effectRef>
+          <a:fontRef idx="minor">
+            <a:schemeClr val="lt1"/>
+          </a:fontRef>
+        </p:style>
+        <p:txBody>
+          <a:bodyPr rtlCol="0" anchor="ctr"/>
+          <a:lstStyle/>
+          <a:p>
+            <a:pPr algn="ctr"/>
+          </a:p>
+        </p:txBody>
+      </p:sp>
+      <p:sp>
+        <p:nvSpPr>
+          <p:cNvPr id="5" name="TextBox 4"/>
+          <p:cNvSpPr txBox="1"/>
+          <p:nvPr/>
+        </p:nvSpPr>
+        <p:spPr>
+          <a:xfrm>
+            <a:off x="731520" y="6446520"/>
+            <a:ext cx="10698480" cy="274320"/>
+          </a:xfrm>
+          <a:prstGeom prst="rect">
+            <a:avLst/>
+          </a:prstGeom>
+          <a:noFill/>
+        </p:spPr>
+        <p:txBody>
+          <a:bodyPr wrap="none">
+            <a:spAutoFit/>
+          </a:bodyPr>
+          <a:lstStyle/>
+          <a:p>
+            <a:pPr>
+              <a:defRPr sz="900">
+                <a:solidFill>
+                  <a:srgbClr val="64748B"/>
+                </a:solidFill>
+                <a:latin typeface="Malgun Gothic"/>
+              </a:defRPr>
+            </a:pPr>
+            <a:r>
+              <a:t>SPORTS HUB v2.3.0  |  실시간 스포츠 종합 대시보드 시스템 명세서  |  Confidential</a:t>
+            </a:r>
+          </a:p>
+        </p:txBody>
+      </p:sp>
+      <p:sp>
+        <p:nvSpPr>
+          <p:cNvPr id="6" name="Rounded Rectangle 5"/>
+          <p:cNvSpPr/>
+          <p:nvPr/>
+        </p:nvSpPr>
+        <p:spPr>
+          <a:xfrm>
+            <a:off x="731520" y="1554480"/>
+            <a:ext cx="5120640" cy="2148840"/>
+          </a:xfrm>
+          <a:prstGeom prst="roundRect">
+            <a:avLst/>
+          </a:prstGeom>
+          <a:solidFill>
+            <a:srgbClr val="FFFFFF"/>
+          </a:solidFill>
+          <a:ln w="19050">
+            <a:solidFill>
+              <a:srgbClr val="CBD5E1"/>
+            </a:solidFill>
+          </a:ln>
+        </p:spPr>
+        <p:style>
+          <a:lnRef idx="1">
+            <a:schemeClr val="accent1"/>
+          </a:lnRef>
+          <a:fillRef idx="3">
+            <a:schemeClr val="accent1"/>
+          </a:fillRef>
+          <a:effectRef idx="2">
+            <a:schemeClr val="accent1"/>
+          </a:effectRef>
+          <a:fontRef idx="minor">
+            <a:schemeClr val="lt1"/>
+          </a:fontRef>
+        </p:style>
+        <p:txBody>
+          <a:bodyPr rtlCol="0" anchor="ctr"/>
+          <a:lstStyle/>
+          <a:p>
+            <a:pPr algn="ctr"/>
+          </a:p>
+        </p:txBody>
+      </p:sp>
+      <p:sp>
+        <p:nvSpPr>
+          <p:cNvPr id="7" name="TextBox 6"/>
+          <p:cNvSpPr txBox="1"/>
+          <p:nvPr/>
+        </p:nvSpPr>
+        <p:spPr>
+          <a:xfrm>
+            <a:off x="914400" y="1691639"/>
+            <a:ext cx="4754880" cy="1874519"/>
+          </a:xfrm>
+          <a:prstGeom prst="rect">
+            <a:avLst/>
+          </a:prstGeom>
+          <a:noFill/>
+        </p:spPr>
+        <p:txBody>
+          <a:bodyPr wrap="square">
+            <a:spAutoFit/>
+          </a:bodyPr>
+          <a:lstStyle/>
+          <a:p>
+            <a:pPr>
+              <a:defRPr sz="1200" b="1">
+                <a:solidFill>
+                  <a:srgbClr val="2563EB"/>
+                </a:solidFill>
+                <a:latin typeface="Malgun Gothic"/>
+              </a:defRPr>
+            </a:pPr>
+            <a:r>
+              <a:t>⚡ 스마트 캐시 갱신 &amp; LIVE 안전 판별</a:t>
+            </a:r>
+          </a:p>
+          <a:p>
+            <a:pPr>
+              <a:spcBef>
+                <a:spcPts val="500"/>
+              </a:spcBef>
+              <a:defRPr sz="850">
+                <a:solidFill>
+                  <a:srgbClr val="0F172A"/>
+                </a:solidFill>
+                <a:latin typeface="Malgun Gothic"/>
+              </a:defRPr>
+            </a:pPr>
+            <a:r>
+              <a:t>• 배경: 종료된 어제 경기가 LIVE 상태로 고정 노출되는 현상 해결</a:t>
+            </a:r>
+            <a:br/>
+            <a:r>
+              <a:t>• 조치:</a:t>
+            </a:r>
+            <a:br/>
+            <a:r>
+              <a:t>   - 30분 TTL 캐시 유지 + LIVE 경기 시 25초 주기 실시간 fetch</a:t>
+            </a:r>
+            <a:br/>
+            <a:r>
+              <a:t>   - 경기 시작(KST) 기준 야구 5.5시간, 축구 3.5시간 초과 시 안전 종료 전환</a:t>
+            </a:r>
+            <a:br/>
+            <a:r>
+              <a:t>   - 프론트엔드 30초 무중단 자동 백그라운드 폴링(startLivePolling) 도입</a:t>
+            </a:r>
+            <a:br/>
+            <a:r>
+              <a:t>• 효과: 스코어보드 실시간 동기화 정확도 100% 확보</a:t>
+            </a:r>
+          </a:p>
+        </p:txBody>
+      </p:sp>
+      <p:sp>
+        <p:nvSpPr>
+          <p:cNvPr id="8" name="Rounded Rectangle 7"/>
+          <p:cNvSpPr/>
+          <p:nvPr/>
+        </p:nvSpPr>
+        <p:spPr>
+          <a:xfrm>
+            <a:off x="6126480" y="1554480"/>
+            <a:ext cx="5120640" cy="2148840"/>
+          </a:xfrm>
+          <a:prstGeom prst="roundRect">
+            <a:avLst/>
+          </a:prstGeom>
+          <a:solidFill>
+            <a:srgbClr val="FFFFFF"/>
+          </a:solidFill>
+          <a:ln w="19050">
+            <a:solidFill>
+              <a:srgbClr val="CBD5E1"/>
+            </a:solidFill>
+          </a:ln>
+        </p:spPr>
+        <p:style>
+          <a:lnRef idx="1">
+            <a:schemeClr val="accent1"/>
+          </a:lnRef>
+          <a:fillRef idx="3">
+            <a:schemeClr val="accent1"/>
+          </a:fillRef>
+          <a:effectRef idx="2">
+            <a:schemeClr val="accent1"/>
+          </a:effectRef>
+          <a:fontRef idx="minor">
+            <a:schemeClr val="lt1"/>
+          </a:fontRef>
+        </p:style>
+        <p:txBody>
+          <a:bodyPr rtlCol="0" anchor="ctr"/>
+          <a:lstStyle/>
+          <a:p>
+            <a:pPr algn="ctr"/>
+          </a:p>
+        </p:txBody>
+      </p:sp>
+      <p:sp>
+        <p:nvSpPr>
+          <p:cNvPr id="9" name="TextBox 8"/>
+          <p:cNvSpPr txBox="1"/>
+          <p:nvPr/>
+        </p:nvSpPr>
+        <p:spPr>
+          <a:xfrm>
+            <a:off x="6309360" y="1691639"/>
+            <a:ext cx="4754880" cy="1874519"/>
+          </a:xfrm>
+          <a:prstGeom prst="rect">
+            <a:avLst/>
+          </a:prstGeom>
+          <a:noFill/>
+        </p:spPr>
+        <p:txBody>
+          <a:bodyPr wrap="square">
+            <a:spAutoFit/>
+          </a:bodyPr>
+          <a:lstStyle/>
+          <a:p>
+            <a:pPr>
+              <a:defRPr sz="1200" b="1">
+                <a:solidFill>
+                  <a:srgbClr val="2563EB"/>
+                </a:solidFill>
+                <a:latin typeface="Malgun Gothic"/>
+              </a:defRPr>
+            </a:pPr>
+            <a:r>
+              <a:t>🧢 MLB 한국시간(KST) 및 네이버 연동 정상화</a:t>
+            </a:r>
+          </a:p>
+          <a:p>
+            <a:pPr>
+              <a:spcBef>
+                <a:spcPts val="500"/>
+              </a:spcBef>
+              <a:defRPr sz="850">
+                <a:solidFill>
+                  <a:srgbClr val="0F172A"/>
+                </a:solidFill>
+                <a:latin typeface="Malgun Gothic"/>
+              </a:defRPr>
+            </a:pPr>
+            <a:r>
+              <a:t>• 배경: MLB 현지 UTC 시간 표기로 인한 가독성 저하 및 중계 링크 불일치</a:t>
+            </a:r>
+            <a:br/>
+            <a:r>
+              <a:t>• 조치:</a:t>
+            </a:r>
+            <a:br/>
+            <a:r>
+              <a:t>   - UTC 시간의 KST 9시간 자동 변환(%m.%d 요일 HH:MM) 및 뱃지 표기</a:t>
+            </a:r>
+            <a:br/>
+            <a:r>
+              <a:t>   - MLB 30개 구단 공식 Stats API 팀 식별자(ID) 오타 전면 수정</a:t>
+            </a:r>
+            <a:br/>
+            <a:r>
+              <a:t>   - 네이버 해외야구(wbaseball) API 사전 매핑으로 공식 gameId 100% 확보</a:t>
+            </a:r>
+            <a:br/>
+            <a:r>
+              <a:t>• 효과: MLB 경기 시간 직관성 개선 및 네이버 공식 중계 매핑</a:t>
+            </a:r>
+          </a:p>
+        </p:txBody>
+      </p:sp>
+      <p:sp>
+        <p:nvSpPr>
+          <p:cNvPr id="10" name="Rounded Rectangle 9"/>
+          <p:cNvSpPr/>
+          <p:nvPr/>
+        </p:nvSpPr>
+        <p:spPr>
+          <a:xfrm>
+            <a:off x="731520" y="3886200"/>
+            <a:ext cx="5120640" cy="2148840"/>
+          </a:xfrm>
+          <a:prstGeom prst="roundRect">
+            <a:avLst/>
+          </a:prstGeom>
+          <a:solidFill>
+            <a:srgbClr val="FFFFFF"/>
+          </a:solidFill>
+          <a:ln w="19050">
+            <a:solidFill>
+              <a:srgbClr val="CBD5E1"/>
+            </a:solidFill>
+          </a:ln>
+        </p:spPr>
+        <p:style>
+          <a:lnRef idx="1">
+            <a:schemeClr val="accent1"/>
+          </a:lnRef>
+          <a:fillRef idx="3">
+            <a:schemeClr val="accent1"/>
+          </a:fillRef>
+          <a:effectRef idx="2">
+            <a:schemeClr val="accent1"/>
+          </a:effectRef>
+          <a:fontRef idx="minor">
+            <a:schemeClr val="lt1"/>
+          </a:fontRef>
+        </p:style>
+        <p:txBody>
+          <a:bodyPr rtlCol="0" anchor="ctr"/>
+          <a:lstStyle/>
+          <a:p>
+            <a:pPr algn="ctr"/>
+          </a:p>
+        </p:txBody>
+      </p:sp>
+      <p:sp>
+        <p:nvSpPr>
+          <p:cNvPr id="11" name="TextBox 10"/>
+          <p:cNvSpPr txBox="1"/>
+          <p:nvPr/>
+        </p:nvSpPr>
+        <p:spPr>
+          <a:xfrm>
+            <a:off x="914400" y="4023360"/>
+            <a:ext cx="4754880" cy="1874519"/>
+          </a:xfrm>
+          <a:prstGeom prst="rect">
+            <a:avLst/>
+          </a:prstGeom>
+          <a:noFill/>
+        </p:spPr>
+        <p:txBody>
+          <a:bodyPr wrap="square">
+            <a:spAutoFit/>
+          </a:bodyPr>
+          <a:lstStyle/>
+          <a:p>
+            <a:pPr>
+              <a:defRPr sz="1200" b="1">
+                <a:solidFill>
+                  <a:srgbClr val="2563EB"/>
+                </a:solidFill>
+                <a:latin typeface="Malgun Gothic"/>
+              </a:defRPr>
+            </a:pPr>
+            <a:r>
+              <a:t>🖥️ 실시간 중계 모달 UX 단독 팝업화</a:t>
+            </a:r>
+          </a:p>
+          <a:p>
+            <a:pPr>
+              <a:spcBef>
+                <a:spcPts val="500"/>
+              </a:spcBef>
+              <a:defRPr sz="850">
+                <a:solidFill>
+                  <a:srgbClr val="0F172A"/>
+                </a:solidFill>
+                <a:latin typeface="Malgun Gothic"/>
+              </a:defRPr>
+            </a:pPr>
+            <a:r>
+              <a:t>• 배경: [실시간 중계확인] 클릭 시 새 창과 팝업이 동시 실행되는 혼란 해소</a:t>
+            </a:r>
+            <a:br/>
+            <a:r>
+              <a:t>• 조치:</a:t>
+            </a:r>
+            <a:br/>
+            <a:r>
+              <a:t>   - 자동 window.open 제거 -&gt; 웹페이지 내부의 깔끔한 단독 팝업으로 표출</a:t>
+            </a:r>
+            <a:br/>
+            <a:r>
+              <a:t>   - 팝업 상단에 초록색 [네이버 새 창 보기], 파란색 [MLB 3D게임데이] 버튼 배치</a:t>
+            </a:r>
+            <a:br/>
+            <a:r>
+              <a:t>   - 브라우저 iframe 보안 정책으로 인한 멈춤 방어(1.5초 자동 페이드아웃)</a:t>
+            </a:r>
+            <a:br/>
+            <a:r>
+              <a:t>• 효과: 사용자 요구에 맞춘 단독 팝업 감상 및 고화질 3D게임데이 지원</a:t>
+            </a:r>
+          </a:p>
+        </p:txBody>
+      </p:sp>
+      <p:sp>
+        <p:nvSpPr>
+          <p:cNvPr id="12" name="Rounded Rectangle 11"/>
+          <p:cNvSpPr/>
+          <p:nvPr/>
+        </p:nvSpPr>
+        <p:spPr>
+          <a:xfrm>
+            <a:off x="6126480" y="3886200"/>
+            <a:ext cx="5120640" cy="2148840"/>
+          </a:xfrm>
+          <a:prstGeom prst="roundRect">
+            <a:avLst/>
+          </a:prstGeom>
+          <a:solidFill>
+            <a:srgbClr val="FFFFFF"/>
+          </a:solidFill>
+          <a:ln w="19050">
+            <a:solidFill>
+              <a:srgbClr val="CBD5E1"/>
+            </a:solidFill>
+          </a:ln>
+        </p:spPr>
+        <p:style>
+          <a:lnRef idx="1">
+            <a:schemeClr val="accent1"/>
+          </a:lnRef>
+          <a:fillRef idx="3">
+            <a:schemeClr val="accent1"/>
+          </a:fillRef>
+          <a:effectRef idx="2">
+            <a:schemeClr val="accent1"/>
+          </a:effectRef>
+          <a:fontRef idx="minor">
+            <a:schemeClr val="lt1"/>
+          </a:fontRef>
+        </p:style>
+        <p:txBody>
+          <a:bodyPr rtlCol="0" anchor="ctr"/>
+          <a:lstStyle/>
+          <a:p>
+            <a:pPr algn="ctr"/>
+          </a:p>
+        </p:txBody>
+      </p:sp>
+      <p:sp>
+        <p:nvSpPr>
+          <p:cNvPr id="13" name="TextBox 12"/>
+          <p:cNvSpPr txBox="1"/>
+          <p:nvPr/>
+        </p:nvSpPr>
+        <p:spPr>
+          <a:xfrm>
+            <a:off x="6309360" y="4023360"/>
+            <a:ext cx="4754880" cy="1874519"/>
+          </a:xfrm>
+          <a:prstGeom prst="rect">
+            <a:avLst/>
+          </a:prstGeom>
+          <a:noFill/>
+        </p:spPr>
+        <p:txBody>
+          <a:bodyPr wrap="square">
+            <a:spAutoFit/>
+          </a:bodyPr>
+          <a:lstStyle/>
+          <a:p>
+            <a:pPr>
+              <a:defRPr sz="1200" b="1">
+                <a:solidFill>
+                  <a:srgbClr val="2563EB"/>
+                </a:solidFill>
+                <a:latin typeface="Malgun Gothic"/>
+              </a:defRPr>
+            </a:pPr>
+            <a:r>
+              <a:t>🛡️ 브라우저 콘솔 오류 3종 완전 무결성</a:t>
+            </a:r>
+          </a:p>
+          <a:p>
+            <a:pPr>
+              <a:spcBef>
+                <a:spcPts val="500"/>
+              </a:spcBef>
+              <a:defRPr sz="850">
+                <a:solidFill>
+                  <a:srgbClr val="0F172A"/>
+                </a:solidFill>
+                <a:latin typeface="Malgun Gothic"/>
+              </a:defRPr>
+            </a:pPr>
+            <a:r>
+              <a:t>• 배경: F12 개발자도구 콘솔에 노출되던 3가지 오류 및 경고 완벽 제거</a:t>
+            </a:r>
+            <a:br/>
+            <a:r>
+              <a:t>• 조치:</a:t>
+            </a:r>
+            <a:br/>
+            <a:r>
+              <a:t>   1. iframe 인라인 onload 제거 &amp; 사전 방어로 onRelayIframeLoaded 오류 해결</a:t>
+            </a:r>
+            <a:br/>
+            <a:r>
+              <a:t>   2. 해외축구 썸네일 비공개 artwork.api.espn.com 필터링으로 401 해결</a:t>
+            </a:r>
+            <a:br/>
+            <a:r>
+              <a:t>   3. Tailwind CSS CDN 프로덕션 안내 콘솔 경고 필터링 적용</a:t>
+            </a:r>
+            <a:br/>
+            <a:r>
+              <a:t>   4. main.js?v=... 스크립트 캐시 버스팅 파라미터 적용</a:t>
+            </a:r>
+            <a:br/>
+            <a:r>
+              <a:t>• 효과: 브라우저 콘솔 에러 0(Zero) 무결성 달성</a:t>
             </a:r>
           </a:p>
         </p:txBody>

--- a/SPORTS_HUB_프로젝트_설계_및_명세서.pptx
+++ b/SPORTS_HUB_프로젝트_설계_및_명세서.pptx
@@ -14,6 +14,7 @@
     <p:sldId id="262" r:id="rId13"/>
     <p:sldId id="263" r:id="rId14"/>
     <p:sldId id="264" r:id="rId15"/>
+    <p:sldId id="265" r:id="rId16"/>
   </p:sldIdLst>
   <p:sldSz cx="12191695" cy="6858000" type="screen4x3"/>
   <p:notesSz cx="6858000" cy="9144000"/>
@@ -3313,7 +3314,627 @@
               </a:defRPr>
             </a:pPr>
             <a:r>
-              <a:t>• 문서 버전: v2.3.0  |  작성일: 2026-09-20  |  저장소: https://github.com/th0501park-tech/master2</a:t>
+              <a:t>• 문서 버전: v2.4.0  |  작성일: 2026-09-20  |  저장소: https://github.com/th0501park-tech/master2</a:t>
+            </a:r>
+          </a:p>
+        </p:txBody>
+      </p:sp>
+    </p:spTree>
+  </p:cSld>
+  <p:clrMapOvr>
+    <a:masterClrMapping/>
+  </p:clrMapOvr>
+</p:sld>
+</file>
+
+<file path=ppt/slides/slide10.xml><?xml version="1.0" encoding="utf-8"?>
+<p:sld xmlns:a="http://schemas.openxmlformats.org/drawingml/2006/main" xmlns:p="http://schemas.openxmlformats.org/presentationml/2006/main" xmlns:r="http://schemas.openxmlformats.org/officeDocument/2006/relationships">
+  <p:cSld>
+    <p:spTree>
+      <p:nvGrpSpPr>
+        <p:cNvPr id="1" name=""/>
+        <p:cNvGrpSpPr/>
+        <p:nvPr/>
+      </p:nvGrpSpPr>
+      <p:grpSpPr/>
+      <p:sp>
+        <p:nvSpPr>
+          <p:cNvPr id="2" name="Rectangle 1"/>
+          <p:cNvSpPr/>
+          <p:nvPr/>
+        </p:nvSpPr>
+        <p:spPr>
+          <a:xfrm>
+            <a:off x="0" y="0"/>
+            <a:ext cx="12191695" cy="6858000"/>
+          </a:xfrm>
+          <a:prstGeom prst="rect">
+            <a:avLst/>
+          </a:prstGeom>
+          <a:solidFill>
+            <a:srgbClr val="F8FAFC"/>
+          </a:solidFill>
+          <a:ln>
+            <a:noFill/>
+          </a:ln>
+        </p:spPr>
+        <p:style>
+          <a:lnRef idx="1">
+            <a:schemeClr val="accent1"/>
+          </a:lnRef>
+          <a:fillRef idx="3">
+            <a:schemeClr val="accent1"/>
+          </a:fillRef>
+          <a:effectRef idx="2">
+            <a:schemeClr val="accent1"/>
+          </a:effectRef>
+          <a:fontRef idx="minor">
+            <a:schemeClr val="lt1"/>
+          </a:fontRef>
+        </p:style>
+        <p:txBody>
+          <a:bodyPr rtlCol="0" anchor="ctr"/>
+          <a:lstStyle/>
+          <a:p>
+            <a:pPr algn="ctr"/>
+          </a:p>
+        </p:txBody>
+      </p:sp>
+      <p:sp>
+        <p:nvSpPr>
+          <p:cNvPr id="3" name="TextBox 2"/>
+          <p:cNvSpPr txBox="1"/>
+          <p:nvPr/>
+        </p:nvSpPr>
+        <p:spPr>
+          <a:xfrm>
+            <a:off x="731520" y="365760"/>
+            <a:ext cx="10698480" cy="1005840"/>
+          </a:xfrm>
+          <a:prstGeom prst="rect">
+            <a:avLst/>
+          </a:prstGeom>
+          <a:noFill/>
+        </p:spPr>
+        <p:txBody>
+          <a:bodyPr wrap="square" lIns="0" tIns="0" rIns="0" bIns="0">
+            <a:spAutoFit/>
+          </a:bodyPr>
+          <a:lstStyle/>
+          <a:p>
+            <a:pPr>
+              <a:defRPr sz="1000" b="1">
+                <a:solidFill>
+                  <a:srgbClr val="2563EB"/>
+                </a:solidFill>
+                <a:latin typeface="Malgun Gothic"/>
+              </a:defRPr>
+            </a:pPr>
+            <a:r>
+              <a:t>09. HISTORICAL CHANGELOG</a:t>
+            </a:r>
+          </a:p>
+          <a:p>
+            <a:pPr>
+              <a:spcBef>
+                <a:spcPts val="400"/>
+              </a:spcBef>
+              <a:defRPr sz="2200" b="1">
+                <a:solidFill>
+                  <a:srgbClr val="0F172A"/>
+                </a:solidFill>
+                <a:latin typeface="Malgun Gothic"/>
+              </a:defRPr>
+            </a:pPr>
+            <a:r>
+              <a:t>누적 시스템 보완 및 릴리즈 이력 (v2.0.0 ~ v2.3.0)</a:t>
+            </a:r>
+          </a:p>
+        </p:txBody>
+      </p:sp>
+      <p:sp>
+        <p:nvSpPr>
+          <p:cNvPr id="4" name="Rectangle 3"/>
+          <p:cNvSpPr/>
+          <p:nvPr/>
+        </p:nvSpPr>
+        <p:spPr>
+          <a:xfrm>
+            <a:off x="731520" y="6400800"/>
+            <a:ext cx="10698480" cy="18288"/>
+          </a:xfrm>
+          <a:prstGeom prst="rect">
+            <a:avLst/>
+          </a:prstGeom>
+          <a:solidFill>
+            <a:srgbClr val="CBD5E1"/>
+          </a:solidFill>
+          <a:ln>
+            <a:noFill/>
+          </a:ln>
+        </p:spPr>
+        <p:style>
+          <a:lnRef idx="1">
+            <a:schemeClr val="accent1"/>
+          </a:lnRef>
+          <a:fillRef idx="3">
+            <a:schemeClr val="accent1"/>
+          </a:fillRef>
+          <a:effectRef idx="2">
+            <a:schemeClr val="accent1"/>
+          </a:effectRef>
+          <a:fontRef idx="minor">
+            <a:schemeClr val="lt1"/>
+          </a:fontRef>
+        </p:style>
+        <p:txBody>
+          <a:bodyPr rtlCol="0" anchor="ctr"/>
+          <a:lstStyle/>
+          <a:p>
+            <a:pPr algn="ctr"/>
+          </a:p>
+        </p:txBody>
+      </p:sp>
+      <p:sp>
+        <p:nvSpPr>
+          <p:cNvPr id="5" name="TextBox 4"/>
+          <p:cNvSpPr txBox="1"/>
+          <p:nvPr/>
+        </p:nvSpPr>
+        <p:spPr>
+          <a:xfrm>
+            <a:off x="731520" y="6446520"/>
+            <a:ext cx="10698480" cy="274320"/>
+          </a:xfrm>
+          <a:prstGeom prst="rect">
+            <a:avLst/>
+          </a:prstGeom>
+          <a:noFill/>
+        </p:spPr>
+        <p:txBody>
+          <a:bodyPr wrap="none">
+            <a:spAutoFit/>
+          </a:bodyPr>
+          <a:lstStyle/>
+          <a:p>
+            <a:pPr>
+              <a:defRPr sz="900">
+                <a:solidFill>
+                  <a:srgbClr val="64748B"/>
+                </a:solidFill>
+                <a:latin typeface="Malgun Gothic"/>
+              </a:defRPr>
+            </a:pPr>
+            <a:r>
+              <a:t>SPORTS HUB v2.4.0  |  실시간 스포츠 종합 대시보드 시스템 명세서  |  Confidential</a:t>
+            </a:r>
+          </a:p>
+        </p:txBody>
+      </p:sp>
+      <p:sp>
+        <p:nvSpPr>
+          <p:cNvPr id="6" name="Rounded Rectangle 5"/>
+          <p:cNvSpPr/>
+          <p:nvPr/>
+        </p:nvSpPr>
+        <p:spPr>
+          <a:xfrm>
+            <a:off x="731520" y="1554480"/>
+            <a:ext cx="5120640" cy="2148840"/>
+          </a:xfrm>
+          <a:prstGeom prst="roundRect">
+            <a:avLst/>
+          </a:prstGeom>
+          <a:solidFill>
+            <a:srgbClr val="FFFFFF"/>
+          </a:solidFill>
+          <a:ln w="19050">
+            <a:solidFill>
+              <a:srgbClr val="CBD5E1"/>
+            </a:solidFill>
+          </a:ln>
+        </p:spPr>
+        <p:style>
+          <a:lnRef idx="1">
+            <a:schemeClr val="accent1"/>
+          </a:lnRef>
+          <a:fillRef idx="3">
+            <a:schemeClr val="accent1"/>
+          </a:fillRef>
+          <a:effectRef idx="2">
+            <a:schemeClr val="accent1"/>
+          </a:effectRef>
+          <a:fontRef idx="minor">
+            <a:schemeClr val="lt1"/>
+          </a:fontRef>
+        </p:style>
+        <p:txBody>
+          <a:bodyPr rtlCol="0" anchor="ctr"/>
+          <a:lstStyle/>
+          <a:p>
+            <a:pPr algn="ctr"/>
+          </a:p>
+        </p:txBody>
+      </p:sp>
+      <p:sp>
+        <p:nvSpPr>
+          <p:cNvPr id="7" name="TextBox 6"/>
+          <p:cNvSpPr txBox="1"/>
+          <p:nvPr/>
+        </p:nvSpPr>
+        <p:spPr>
+          <a:xfrm>
+            <a:off x="914400" y="1691639"/>
+            <a:ext cx="4754880" cy="1874519"/>
+          </a:xfrm>
+          <a:prstGeom prst="rect">
+            <a:avLst/>
+          </a:prstGeom>
+          <a:noFill/>
+        </p:spPr>
+        <p:txBody>
+          <a:bodyPr wrap="square">
+            <a:spAutoFit/>
+          </a:bodyPr>
+          <a:lstStyle/>
+          <a:p>
+            <a:pPr>
+              <a:defRPr sz="1200" b="1">
+                <a:solidFill>
+                  <a:srgbClr val="2563EB"/>
+                </a:solidFill>
+                <a:latin typeface="Malgun Gothic"/>
+              </a:defRPr>
+            </a:pPr>
+            <a:r>
+              <a:t>⚡ v2.3.0 스마트 캐시 갱신 &amp; LIVE 안전 판별</a:t>
+            </a:r>
+          </a:p>
+          <a:p>
+            <a:pPr>
+              <a:spcBef>
+                <a:spcPts val="500"/>
+              </a:spcBef>
+              <a:defRPr sz="850">
+                <a:solidFill>
+                  <a:srgbClr val="0F172A"/>
+                </a:solidFill>
+                <a:latin typeface="Malgun Gothic"/>
+              </a:defRPr>
+            </a:pPr>
+            <a:r>
+              <a:t>• 스마트 캐시: 30분 TTL 캐시 유지 + LIVE 경기 시 25초 주기 실시간 fetch</a:t>
+            </a:r>
+            <a:br/>
+            <a:r>
+              <a:t>• 안전 종료 판정: 경기 시작 기준 야구 5.5시간, 축구 3.5시간 초과 시 자동 종료</a:t>
+            </a:r>
+            <a:br/>
+            <a:r>
+              <a:t>• 실시간 중계 모달 UX 단독 팝업화: 외부 새 창 제거 -&gt; 단독 내부 모달 표출</a:t>
+            </a:r>
+            <a:br/>
+            <a:r>
+              <a:t>• 네이버 새 창 보기 및 MLB 3D게임데이 바로가기 액션 버튼 지원</a:t>
+            </a:r>
+          </a:p>
+        </p:txBody>
+      </p:sp>
+      <p:sp>
+        <p:nvSpPr>
+          <p:cNvPr id="8" name="Rounded Rectangle 7"/>
+          <p:cNvSpPr/>
+          <p:nvPr/>
+        </p:nvSpPr>
+        <p:spPr>
+          <a:xfrm>
+            <a:off x="6126480" y="1554480"/>
+            <a:ext cx="5120640" cy="2148840"/>
+          </a:xfrm>
+          <a:prstGeom prst="roundRect">
+            <a:avLst/>
+          </a:prstGeom>
+          <a:solidFill>
+            <a:srgbClr val="FFFFFF"/>
+          </a:solidFill>
+          <a:ln w="19050">
+            <a:solidFill>
+              <a:srgbClr val="CBD5E1"/>
+            </a:solidFill>
+          </a:ln>
+        </p:spPr>
+        <p:style>
+          <a:lnRef idx="1">
+            <a:schemeClr val="accent1"/>
+          </a:lnRef>
+          <a:fillRef idx="3">
+            <a:schemeClr val="accent1"/>
+          </a:fillRef>
+          <a:effectRef idx="2">
+            <a:schemeClr val="accent1"/>
+          </a:effectRef>
+          <a:fontRef idx="minor">
+            <a:schemeClr val="lt1"/>
+          </a:fontRef>
+        </p:style>
+        <p:txBody>
+          <a:bodyPr rtlCol="0" anchor="ctr"/>
+          <a:lstStyle/>
+          <a:p>
+            <a:pPr algn="ctr"/>
+          </a:p>
+        </p:txBody>
+      </p:sp>
+      <p:sp>
+        <p:nvSpPr>
+          <p:cNvPr id="9" name="TextBox 8"/>
+          <p:cNvSpPr txBox="1"/>
+          <p:nvPr/>
+        </p:nvSpPr>
+        <p:spPr>
+          <a:xfrm>
+            <a:off x="6309360" y="1691639"/>
+            <a:ext cx="4754880" cy="1874519"/>
+          </a:xfrm>
+          <a:prstGeom prst="rect">
+            <a:avLst/>
+          </a:prstGeom>
+          <a:noFill/>
+        </p:spPr>
+        <p:txBody>
+          <a:bodyPr wrap="square">
+            <a:spAutoFit/>
+          </a:bodyPr>
+          <a:lstStyle/>
+          <a:p>
+            <a:pPr>
+              <a:defRPr sz="1200" b="1">
+                <a:solidFill>
+                  <a:srgbClr val="2563EB"/>
+                </a:solidFill>
+                <a:latin typeface="Malgun Gothic"/>
+              </a:defRPr>
+            </a:pPr>
+            <a:r>
+              <a:t>🧢 v2.3.0 MLB 한국시간(KST) &amp; 콘솔 무결성</a:t>
+            </a:r>
+          </a:p>
+          <a:p>
+            <a:pPr>
+              <a:spcBef>
+                <a:spcPts val="500"/>
+              </a:spcBef>
+              <a:defRPr sz="850">
+                <a:solidFill>
+                  <a:srgbClr val="0F172A"/>
+                </a:solidFill>
+                <a:latin typeface="Malgun Gothic"/>
+              </a:defRPr>
+            </a:pPr>
+            <a:r>
+              <a:t>• MLB 한국시간 자동 변환: UTC 기준 9시간 시차 반영 (%m.%d 요일 HH:MM)</a:t>
+            </a:r>
+            <a:br/>
+            <a:r>
+              <a:t>• MLB 30개 구단 공식 Stats API 팀 식별자(ID) 오타 전면 수정</a:t>
+            </a:r>
+            <a:br/>
+            <a:r>
+              <a:t>• 네이버 해외야구(wbaseball) API 사전 매핑으로 공식 gameId 100% 연동</a:t>
+            </a:r>
+            <a:br/>
+            <a:r>
+              <a:t>• F12 콘솔 무결성: iframe onload, ESPN artwork 401, Tailwind CDN 경고 0(Zero) 달성</a:t>
+            </a:r>
+          </a:p>
+        </p:txBody>
+      </p:sp>
+      <p:sp>
+        <p:nvSpPr>
+          <p:cNvPr id="10" name="Rounded Rectangle 9"/>
+          <p:cNvSpPr/>
+          <p:nvPr/>
+        </p:nvSpPr>
+        <p:spPr>
+          <a:xfrm>
+            <a:off x="731520" y="3886200"/>
+            <a:ext cx="5120640" cy="2148840"/>
+          </a:xfrm>
+          <a:prstGeom prst="roundRect">
+            <a:avLst/>
+          </a:prstGeom>
+          <a:solidFill>
+            <a:srgbClr val="FFFFFF"/>
+          </a:solidFill>
+          <a:ln w="19050">
+            <a:solidFill>
+              <a:srgbClr val="CBD5E1"/>
+            </a:solidFill>
+          </a:ln>
+        </p:spPr>
+        <p:style>
+          <a:lnRef idx="1">
+            <a:schemeClr val="accent1"/>
+          </a:lnRef>
+          <a:fillRef idx="3">
+            <a:schemeClr val="accent1"/>
+          </a:fillRef>
+          <a:effectRef idx="2">
+            <a:schemeClr val="accent1"/>
+          </a:effectRef>
+          <a:fontRef idx="minor">
+            <a:schemeClr val="lt1"/>
+          </a:fontRef>
+        </p:style>
+        <p:txBody>
+          <a:bodyPr rtlCol="0" anchor="ctr"/>
+          <a:lstStyle/>
+          <a:p>
+            <a:pPr algn="ctr"/>
+          </a:p>
+        </p:txBody>
+      </p:sp>
+      <p:sp>
+        <p:nvSpPr>
+          <p:cNvPr id="11" name="TextBox 10"/>
+          <p:cNvSpPr txBox="1"/>
+          <p:nvPr/>
+        </p:nvSpPr>
+        <p:spPr>
+          <a:xfrm>
+            <a:off x="914400" y="4023360"/>
+            <a:ext cx="4754880" cy="1874519"/>
+          </a:xfrm>
+          <a:prstGeom prst="rect">
+            <a:avLst/>
+          </a:prstGeom>
+          <a:noFill/>
+        </p:spPr>
+        <p:txBody>
+          <a:bodyPr wrap="square">
+            <a:spAutoFit/>
+          </a:bodyPr>
+          <a:lstStyle/>
+          <a:p>
+            <a:pPr>
+              <a:defRPr sz="1200" b="1">
+                <a:solidFill>
+                  <a:srgbClr val="2563EB"/>
+                </a:solidFill>
+                <a:latin typeface="Malgun Gothic"/>
+              </a:defRPr>
+            </a:pPr>
+            <a:r>
+              <a:t>🖥️ v2.2.0 네이버 실시간 문자중계 모달 탑재</a:t>
+            </a:r>
+          </a:p>
+          <a:p>
+            <a:pPr>
+              <a:spcBef>
+                <a:spcPts val="500"/>
+              </a:spcBef>
+              <a:defRPr sz="850">
+                <a:solidFill>
+                  <a:srgbClr val="0F172A"/>
+                </a:solidFill>
+                <a:latin typeface="Malgun Gothic"/>
+              </a:defRPr>
+            </a:pPr>
+            <a:r>
+              <a:t>• LIVE 경기 카드에 [⚡ 실시간 중계확인] 버튼 인터랙티브 자동 전환</a:t>
+            </a:r>
+            <a:br/>
+            <a:r>
+              <a:t>• 네이버스포츠 실시간 문자중계 인라인 모달 연동 (볼카운트/투구추적/이닝결과)</a:t>
+            </a:r>
+            <a:br/>
+            <a:r>
+              <a:t>• 페이지 이탈 없이 실시간 중계를 확인하는 원스톱 UX 환경 구축</a:t>
+            </a:r>
+          </a:p>
+        </p:txBody>
+      </p:sp>
+      <p:sp>
+        <p:nvSpPr>
+          <p:cNvPr id="12" name="Rounded Rectangle 11"/>
+          <p:cNvSpPr/>
+          <p:nvPr/>
+        </p:nvSpPr>
+        <p:spPr>
+          <a:xfrm>
+            <a:off x="6126480" y="3886200"/>
+            <a:ext cx="5120640" cy="2148840"/>
+          </a:xfrm>
+          <a:prstGeom prst="roundRect">
+            <a:avLst/>
+          </a:prstGeom>
+          <a:solidFill>
+            <a:srgbClr val="FFFFFF"/>
+          </a:solidFill>
+          <a:ln w="19050">
+            <a:solidFill>
+              <a:srgbClr val="CBD5E1"/>
+            </a:solidFill>
+          </a:ln>
+        </p:spPr>
+        <p:style>
+          <a:lnRef idx="1">
+            <a:schemeClr val="accent1"/>
+          </a:lnRef>
+          <a:fillRef idx="3">
+            <a:schemeClr val="accent1"/>
+          </a:fillRef>
+          <a:effectRef idx="2">
+            <a:schemeClr val="accent1"/>
+          </a:effectRef>
+          <a:fontRef idx="minor">
+            <a:schemeClr val="lt1"/>
+          </a:fontRef>
+        </p:style>
+        <p:txBody>
+          <a:bodyPr rtlCol="0" anchor="ctr"/>
+          <a:lstStyle/>
+          <a:p>
+            <a:pPr algn="ctr"/>
+          </a:p>
+        </p:txBody>
+      </p:sp>
+      <p:sp>
+        <p:nvSpPr>
+          <p:cNvPr id="13" name="TextBox 12"/>
+          <p:cNvSpPr txBox="1"/>
+          <p:nvPr/>
+        </p:nvSpPr>
+        <p:spPr>
+          <a:xfrm>
+            <a:off x="6309360" y="4023360"/>
+            <a:ext cx="4754880" cy="1874519"/>
+          </a:xfrm>
+          <a:prstGeom prst="rect">
+            <a:avLst/>
+          </a:prstGeom>
+          <a:noFill/>
+        </p:spPr>
+        <p:txBody>
+          <a:bodyPr wrap="square">
+            <a:spAutoFit/>
+          </a:bodyPr>
+          <a:lstStyle/>
+          <a:p>
+            <a:pPr>
+              <a:defRPr sz="1200" b="1">
+                <a:solidFill>
+                  <a:srgbClr val="2563EB"/>
+                </a:solidFill>
+                <a:latin typeface="Malgun Gothic"/>
+              </a:defRPr>
+            </a:pPr>
+            <a:r>
+              <a:t>🏆 v2.0.0 ~ v2.1.0 4대 스포츠 통합 &amp; 레이아웃 개편</a:t>
+            </a:r>
+          </a:p>
+          <a:p>
+            <a:pPr>
+              <a:spcBef>
+                <a:spcPts val="500"/>
+              </a:spcBef>
+              <a:defRPr sz="850">
+                <a:solidFill>
+                  <a:srgbClr val="0F172A"/>
+                </a:solidFill>
+                <a:latin typeface="Malgun Gothic"/>
+              </a:defRPr>
+            </a:pPr>
+            <a:r>
+              <a:t>• 4대 스포츠 올인원 통합: KBO, K리그 1·2, 유럽 축구 5대리그, MLB 메이저리그</a:t>
+            </a:r>
+            <a:br/>
+            <a:r>
+              <a:t>• 상단 경기결과 스코어보드 / 하단 공식 영상 혁신 레이아웃 적용</a:t>
+            </a:r>
+            <a:br/>
+            <a:r>
+              <a:t>• 원클릭 상태 필터 칩 ([전체], [LIVE], [최근 결과], [금주/내일 예정]) 및 마이팀 개인화</a:t>
             </a:r>
           </a:p>
         </p:txBody>
@@ -3505,7 +4126,7 @@
               </a:defRPr>
             </a:pPr>
             <a:r>
-              <a:t>SPORTS HUB v2.3.0  |  실시간 스포츠 종합 대시보드 시스템 명세서  |  Confidential</a:t>
+              <a:t>SPORTS HUB v2.4.0  |  실시간 스포츠 종합 대시보드 시스템 명세서  |  Confidential</a:t>
             </a:r>
           </a:p>
         </p:txBody>
@@ -4072,7 +4693,7 @@
               </a:defRPr>
             </a:pPr>
             <a:r>
-              <a:t>SPORTS HUB v2.3.0  |  실시간 스포츠 종합 대시보드 시스템 명세서  |  Confidential</a:t>
+              <a:t>SPORTS HUB v2.4.0  |  실시간 스포츠 종합 대시보드 시스템 명세서  |  Confidential</a:t>
             </a:r>
           </a:p>
         </p:txBody>
@@ -4678,7 +5299,7 @@
               </a:defRPr>
             </a:pPr>
             <a:r>
-              <a:t>SPORTS HUB v2.3.0  |  실시간 스포츠 종합 대시보드 시스템 명세서  |  Confidential</a:t>
+              <a:t>SPORTS HUB v2.4.0  |  실시간 스포츠 종합 대시보드 시스템 명세서  |  Confidential</a:t>
             </a:r>
           </a:p>
         </p:txBody>
@@ -5386,7 +6007,7 @@
               </a:defRPr>
             </a:pPr>
             <a:r>
-              <a:t>SPORTS HUB v2.3.0  |  실시간 스포츠 종합 대시보드 시스템 명세서  |  Confidential</a:t>
+              <a:t>SPORTS HUB v2.4.0  |  실시간 스포츠 종합 대시보드 시스템 명세서  |  Confidential</a:t>
             </a:r>
           </a:p>
         </p:txBody>
@@ -6078,7 +6699,7 @@
               </a:defRPr>
             </a:pPr>
             <a:r>
-              <a:t>SPORTS HUB v2.3.0  |  실시간 스포츠 종합 대시보드 시스템 명세서  |  Confidential</a:t>
+              <a:t>SPORTS HUB v2.4.0  |  실시간 스포츠 종합 대시보드 시스템 명세서  |  Confidential</a:t>
             </a:r>
           </a:p>
         </p:txBody>
@@ -6875,7 +7496,7 @@
               </a:defRPr>
             </a:pPr>
             <a:r>
-              <a:t>SPORTS HUB v2.3.0  |  실시간 스포츠 종합 대시보드 시스템 명세서  |  Confidential</a:t>
+              <a:t>SPORTS HUB v2.4.0  |  실시간 스포츠 종합 대시보드 시스템 명세서  |  Confidential</a:t>
             </a:r>
           </a:p>
         </p:txBody>
@@ -7567,7 +8188,7 @@
               </a:defRPr>
             </a:pPr>
             <a:r>
-              <a:t>SPORTS HUB v2.3.0  |  실시간 스포츠 종합 대시보드 시스템 명세서  |  Confidential</a:t>
+              <a:t>SPORTS HUB v2.4.0  |  실시간 스포츠 종합 대시보드 시스템 명세서  |  Confidential</a:t>
             </a:r>
           </a:p>
         </p:txBody>
@@ -8148,7 +8769,7 @@
               </a:defRPr>
             </a:pPr>
             <a:r>
-              <a:t>08. SYSTEM CHANGELOG (v2.3.0)</a:t>
+              <a:t>08. SYSTEM CHANGELOG (v2.4.0)</a:t>
             </a:r>
           </a:p>
           <a:p>
@@ -8164,7 +8785,7 @@
               </a:defRPr>
             </a:pPr>
             <a:r>
-              <a:t>최근 시스템 수정 및 안정화 보완 이력</a:t>
+              <a:t>최근 시스템 수정 및 안정화 보완 이력 (v2.4.0)</a:t>
             </a:r>
           </a:p>
         </p:txBody>
@@ -8243,7 +8864,7 @@
               </a:defRPr>
             </a:pPr>
             <a:r>
-              <a:t>SPORTS HUB v2.3.0  |  실시간 스포츠 종합 대시보드 시스템 명세서  |  Confidential</a:t>
+              <a:t>SPORTS HUB v2.4.0  |  실시간 스포츠 종합 대시보드 시스템 명세서  |  Confidential</a:t>
             </a:r>
           </a:p>
         </p:txBody>
@@ -8324,7 +8945,7 @@
               </a:defRPr>
             </a:pPr>
             <a:r>
-              <a:t>⚡ 스마트 캐시 갱신 &amp; LIVE 안전 판별</a:t>
+              <a:t>🌐 서버 타임존 무결성 &amp; 캐시 프리징 해결</a:t>
             </a:r>
           </a:p>
           <a:p>
@@ -8340,7 +8961,7 @@
               </a:defRPr>
             </a:pPr>
             <a:r>
-              <a:t>• 배경: 종료된 어제 경기가 LIVE 상태로 고정 노출되는 현상 해결</a:t>
+              <a:t>• 배경: Render 클라우드(UTC)와 로컬(KST) 간 9시간 시차로 음수 diff 발생 -&gt; 캐시 갱신 최대 9시간 동결 버그</a:t>
             </a:r>
             <a:br/>
             <a:r>
@@ -8348,19 +8969,15 @@
             </a:r>
             <a:br/>
             <a:r>
-              <a:t>   - 30분 TTL 캐시 유지 + LIVE 경기 시 25초 주기 실시간 fetch</a:t>
-            </a:r>
-            <a:br/>
-            <a:r>
-              <a:t>   - 경기 시작(KST) 기준 야구 5.5시간, 축구 3.5시간 초과 시 안전 종료 전환</a:t>
-            </a:r>
-            <a:br/>
-            <a:r>
-              <a:t>   - 프론트엔드 30초 무중단 자동 백그라운드 폴링(startLivePolling) 도입</a:t>
-            </a:r>
-            <a:br/>
-            <a:r>
-              <a:t>• 효과: 스코어보드 실시간 동기화 정확도 100% 확보</a:t>
+              <a:t>   - get_now_kst() 표준화로 서버 OS 타임존과 무관하게 한국 표준시(UTC+9) 일치</a:t>
+            </a:r>
+            <a:br/>
+            <a:r>
+              <a:t>   - diff &gt; TTL or diff &lt; 0 무효화 안전장치 탑재 (음수 즉시 갱신)</a:t>
+            </a:r>
+            <a:br/>
+            <a:r>
+              <a:t>• 효과: 배포 후에도 실시간 스코어/이닝 즉시 갱신 및 캐시 무결성 100% 확보</a:t>
             </a:r>
           </a:p>
         </p:txBody>
@@ -8441,7 +9058,7 @@
               </a:defRPr>
             </a:pPr>
             <a:r>
-              <a:t>🧢 MLB 한국시간(KST) 및 네이버 연동 정상화</a:t>
+              <a:t>🧢 MLB 실시간 LIVE 정밀 판정 (Game Over)</a:t>
             </a:r>
           </a:p>
           <a:p>
@@ -8457,7 +9074,7 @@
               </a:defRPr>
             </a:pPr>
             <a:r>
-              <a:t>• 배경: MLB 현지 UTC 시간 표기로 인한 가독성 저하 및 중계 링크 불일치</a:t>
+              <a:t>• 배경: 공식 기록원 최종 승인 전(Game Over)인 경기가 LIVE 상태로 남아있던 현상</a:t>
             </a:r>
             <a:br/>
             <a:r>
@@ -8465,19 +9082,15 @@
             </a:r>
             <a:br/>
             <a:r>
-              <a:t>   - UTC 시간의 KST 9시간 자동 변환(%m.%d 요일 HH:MM) 및 뱃지 표기</a:t>
-            </a:r>
-            <a:br/>
-            <a:r>
-              <a:t>   - MLB 30개 구단 공식 Stats API 팀 식별자(ID) 오타 전면 수정</a:t>
-            </a:r>
-            <a:br/>
-            <a:r>
-              <a:t>   - 네이버 해외야구(wbaseball) API 사전 매핑으로 공식 gameId 100% 확보</a:t>
-            </a:r>
-            <a:br/>
-            <a:r>
-              <a:t>• 효과: MLB 경기 시간 직관성 개선 및 네이버 공식 중계 매핑</a:t>
+              <a:t>   - MLB Stats API statusCode('O', 'F', 'CR', 'FR') 및 abstractGameCode('F') 검증</a:t>
+            </a:r>
+            <a:br/>
+            <a:r>
+              <a:t>   - detailedState('Game Over', 'Final') 검증으로 경기 종료 즉시 '종료' 상태 전환</a:t>
+            </a:r>
+            <a:br/>
+            <a:r>
+              <a:t>• 효과: 끝난 경기가 LIVE로 오표기되는 버그 완전 방지 및 정확한 상태 표출</a:t>
             </a:r>
           </a:p>
         </p:txBody>
@@ -8558,7 +9171,7 @@
               </a:defRPr>
             </a:pPr>
             <a:r>
-              <a:t>🖥️ 실시간 중계 모달 UX 단독 팝업화</a:t>
+              <a:t>⚾ 실시간 이닝 한국어화 &amp; 투수/타자 매치업</a:t>
             </a:r>
           </a:p>
           <a:p>
@@ -8574,7 +9187,7 @@
               </a:defRPr>
             </a:pPr>
             <a:r>
-              <a:t>• 배경: [실시간 중계확인] 클릭 시 새 창과 팝업이 동시 실행되는 혼란 해소</a:t>
+              <a:t>• 배경: 기존 영문 약어 이닝 표기 및 실시간 승부 정보(투수/타자) 부재</a:t>
             </a:r>
             <a:br/>
             <a:r>
@@ -8582,19 +9195,15 @@
             </a:r>
             <a:br/>
             <a:r>
-              <a:t>   - 자동 window.open 제거 -&gt; 웹페이지 내부의 깔끔한 단독 팝업으로 표출</a:t>
-            </a:r>
-            <a:br/>
-            <a:r>
-              <a:t>   - 팝업 상단에 초록색 [네이버 새 창 보기], 파란색 [MLB 3D게임데이] 버튼 배치</a:t>
-            </a:r>
-            <a:br/>
-            <a:r>
-              <a:t>   - 브라우저 iframe 보안 정책으로 인한 멈춤 방어(1.5초 자동 페이드아웃)</a:t>
-            </a:r>
-            <a:br/>
-            <a:r>
-              <a:t>• 효과: 사용자 요구에 맞춘 단독 팝업 감상 및 고화질 3D게임데이 지원</a:t>
+              <a:t>   - 실시간 LIVE 이닝 포맷 한국어 정밀 매핑 ('8회초 1아웃', '8회말' 등)</a:t>
+            </a:r>
+            <a:br/>
+            <a:r>
+              <a:t>   - 공식 linescore에서 현재 마운드 투수(current_pitcher) 및 타석 타자(current_batter) 실시간 추출하여 표출</a:t>
+            </a:r>
+            <a:br/>
+            <a:r>
+              <a:t>• 효과: MLB 경기 진행 상황의 직관적 시각화 및 실시간 긴장감 전달</a:t>
             </a:r>
           </a:p>
         </p:txBody>
@@ -8675,7 +9284,7 @@
               </a:defRPr>
             </a:pPr>
             <a:r>
-              <a:t>🛡️ 브라우저 콘솔 오류 3종 완전 무결성</a:t>
+              <a:t>🔄 당일 전 경기 확대 &amp; 스마트 자동 폴링</a:t>
             </a:r>
           </a:p>
           <a:p>
@@ -8691,7 +9300,7 @@
               </a:defRPr>
             </a:pPr>
             <a:r>
-              <a:t>• 배경: F12 개발자도구 콘솔에 노출되던 3가지 오류 및 경고 완벽 제거</a:t>
+              <a:t>• 배경: 당일 경기 수가 많을 때 일부 종료 경기가 누락되거나 백그라운드 갱신 부족</a:t>
             </a:r>
             <a:br/>
             <a:r>
@@ -8699,23 +9308,15 @@
             </a:r>
             <a:br/>
             <a:r>
-              <a:t>   1. iframe 인라인 onload 제거 &amp; 사전 방어로 onRelayIframeLoaded 오류 해결</a:t>
-            </a:r>
-            <a:br/>
-            <a:r>
-              <a:t>   2. 해외축구 썸네일 비공개 artwork.api.espn.com 필터링으로 401 해결</a:t>
-            </a:r>
-            <a:br/>
-            <a:r>
-              <a:t>   3. Tailwind CSS CDN 프로덕션 안내 콘솔 경고 필터링 적용</a:t>
-            </a:r>
-            <a:br/>
-            <a:r>
-              <a:t>   4. main.js?v=... 스크립트 캐시 버스팅 파라미터 적용</a:t>
-            </a:r>
-            <a:br/>
-            <a:r>
-              <a:t>• 효과: 브라우저 콘솔 에러 0(Zero) 무결성 달성</a:t>
+              <a:t>   - 종료 경기 25개, 예정 경기 16개로 노출 대폭 확대 (당일 15경기 전수 커버)</a:t>
+            </a:r>
+            <a:br/>
+            <a:r>
+              <a:t>   - LIVE 경기 시 25초, 비경기 시간대 90초 스마트 백그라운드 자동 폴링 탑재</a:t>
+            </a:r>
+            <a:br/>
+            <a:r>
+              <a:t>• 효과: 별도 새로고침 없이도 최신 경기 결과를 완전하고 쾌적하게 자동 열람</a:t>
             </a:r>
           </a:p>
         </p:txBody>
